--- a/docs/pptx/entire/ritu-entire-ratio-by-sex.pptx
+++ b/docs/pptx/entire/ritu-entire-ratio-by-sex.pptx
@@ -2884,7 +2884,7 @@
                     <a:pt x="0" y="2625284"/>
                   </a:moveTo>
                   <a:lnTo>
-                    <a:pt x="13384" y="2619955"/>
+                    <a:pt x="13384" y="2619956"/>
                   </a:lnTo>
                   <a:lnTo>
                     <a:pt x="26769" y="2614470"/>
@@ -2905,7 +2905,7 @@
                     <a:pt x="93693" y="2584440"/>
                   </a:lnTo>
                   <a:lnTo>
-                    <a:pt x="107078" y="2577930"/>
+                    <a:pt x="107078" y="2577931"/>
                   </a:lnTo>
                   <a:lnTo>
                     <a:pt x="120463" y="2571295"/>
@@ -2929,7 +2929,7 @@
                     <a:pt x="200772" y="2529001"/>
                   </a:lnTo>
                   <a:lnTo>
-                    <a:pt x="214157" y="2521623"/>
+                    <a:pt x="214157" y="2521624"/>
                   </a:lnTo>
                   <a:lnTo>
                     <a:pt x="227542" y="2514199"/>
@@ -2941,7 +2941,7 @@
                     <a:pt x="254311" y="2499235"/>
                   </a:lnTo>
                   <a:lnTo>
-                    <a:pt x="267696" y="2491719"/>
+                    <a:pt x="267696" y="2491720"/>
                   </a:lnTo>
                   <a:lnTo>
                     <a:pt x="281081" y="2484205"/>
@@ -2953,7 +2953,7 @@
                     <a:pt x="307851" y="2469218"/>
                   </a:lnTo>
                   <a:lnTo>
-                    <a:pt x="321235" y="2461782"/>
+                    <a:pt x="321235" y="2461783"/>
                   </a:lnTo>
                   <a:lnTo>
                     <a:pt x="334620" y="2454394"/>
@@ -2962,13 +2962,13 @@
                     <a:pt x="348005" y="2447058"/>
                   </a:lnTo>
                   <a:lnTo>
-                    <a:pt x="361390" y="2439799"/>
+                    <a:pt x="361390" y="2439800"/>
                   </a:lnTo>
                   <a:lnTo>
                     <a:pt x="374775" y="2432634"/>
                   </a:lnTo>
                   <a:lnTo>
-                    <a:pt x="388160" y="2425548"/>
+                    <a:pt x="388160" y="2425549"/>
                   </a:lnTo>
                   <a:lnTo>
                     <a:pt x="401544" y="2418546"/>
@@ -2980,7 +2980,7 @@
                     <a:pt x="428314" y="2404878"/>
                   </a:lnTo>
                   <a:lnTo>
-                    <a:pt x="441699" y="2398192"/>
+                    <a:pt x="441699" y="2398193"/>
                   </a:lnTo>
                   <a:lnTo>
                     <a:pt x="455084" y="2391598"/>
@@ -3001,7 +3001,7 @@
                     <a:pt x="522008" y="2360041"/>
                   </a:lnTo>
                   <a:lnTo>
-                    <a:pt x="535393" y="2353934"/>
+                    <a:pt x="535393" y="2353935"/>
                   </a:lnTo>
                   <a:lnTo>
                     <a:pt x="548778" y="2347857"/>
@@ -3022,7 +3022,7 @@
                     <a:pt x="615702" y="2317326"/>
                   </a:lnTo>
                   <a:lnTo>
-                    <a:pt x="629087" y="2311020"/>
+                    <a:pt x="629087" y="2311021"/>
                   </a:lnTo>
                   <a:lnTo>
                     <a:pt x="642471" y="2304585"/>
@@ -3043,10 +3043,10 @@
                     <a:pt x="709396" y="2269687"/>
                   </a:lnTo>
                   <a:lnTo>
-                    <a:pt x="722780" y="2262010"/>
-                  </a:lnTo>
-                  <a:lnTo>
-                    <a:pt x="736165" y="2253948"/>
+                    <a:pt x="722780" y="2262011"/>
+                  </a:lnTo>
+                  <a:lnTo>
+                    <a:pt x="736165" y="2253949"/>
                   </a:lnTo>
                   <a:lnTo>
                     <a:pt x="749550" y="2245563"/>
@@ -3073,10 +3073,10 @@
                     <a:pt x="843244" y="2176291"/>
                   </a:lnTo>
                   <a:lnTo>
-                    <a:pt x="856629" y="2164670"/>
-                  </a:lnTo>
-                  <a:lnTo>
-                    <a:pt x="870014" y="2152658"/>
+                    <a:pt x="856629" y="2164671"/>
+                  </a:lnTo>
+                  <a:lnTo>
+                    <a:pt x="870014" y="2152659"/>
                   </a:lnTo>
                   <a:lnTo>
                     <a:pt x="883398" y="2140255"/>
@@ -3088,7 +3088,7 @@
                     <a:pt x="910168" y="2113888"/>
                   </a:lnTo>
                   <a:lnTo>
-                    <a:pt x="923553" y="2100135"/>
+                    <a:pt x="923553" y="2100136"/>
                   </a:lnTo>
                   <a:lnTo>
                     <a:pt x="936938" y="2086003"/>
@@ -3100,19 +3100,19 @@
                     <a:pt x="963707" y="2056329"/>
                   </a:lnTo>
                   <a:lnTo>
-                    <a:pt x="977092" y="2040989"/>
+                    <a:pt x="977092" y="2040990"/>
                   </a:lnTo>
                   <a:lnTo>
                     <a:pt x="990477" y="2025313"/>
                   </a:lnTo>
                   <a:lnTo>
-                    <a:pt x="1003862" y="2009195"/>
+                    <a:pt x="1003862" y="2009196"/>
                   </a:lnTo>
                   <a:lnTo>
                     <a:pt x="1017247" y="1992798"/>
                   </a:lnTo>
                   <a:lnTo>
-                    <a:pt x="1030632" y="1976132"/>
+                    <a:pt x="1030632" y="1976133"/>
                   </a:lnTo>
                   <a:lnTo>
                     <a:pt x="1044016" y="1959192"/>
@@ -3127,13 +3127,13 @@
                     <a:pt x="1084171" y="1906726"/>
                   </a:lnTo>
                   <a:lnTo>
-                    <a:pt x="1097556" y="1888817"/>
+                    <a:pt x="1097556" y="1888818"/>
                   </a:lnTo>
                   <a:lnTo>
                     <a:pt x="1110941" y="1870660"/>
                   </a:lnTo>
                   <a:lnTo>
-                    <a:pt x="1124325" y="1852340"/>
+                    <a:pt x="1124325" y="1852341"/>
                   </a:lnTo>
                   <a:lnTo>
                     <a:pt x="1137710" y="1833864"/>
@@ -3142,7 +3142,7 @@
                     <a:pt x="1151095" y="1815219"/>
                   </a:lnTo>
                   <a:lnTo>
-                    <a:pt x="1164480" y="1796376"/>
+                    <a:pt x="1164480" y="1796377"/>
                   </a:lnTo>
                   <a:lnTo>
                     <a:pt x="1177865" y="1777396"/>
@@ -3154,13 +3154,13 @@
                     <a:pt x="1204634" y="1739001"/>
                   </a:lnTo>
                   <a:lnTo>
-                    <a:pt x="1218019" y="1719532"/>
+                    <a:pt x="1218019" y="1719533"/>
                   </a:lnTo>
                   <a:lnTo>
                     <a:pt x="1231404" y="1699917"/>
                   </a:lnTo>
                   <a:lnTo>
-                    <a:pt x="1244789" y="1680149"/>
+                    <a:pt x="1244789" y="1680150"/>
                   </a:lnTo>
                   <a:lnTo>
                     <a:pt x="1258174" y="1660195"/>
@@ -3181,7 +3181,7 @@
                     <a:pt x="1325098" y="1557176"/>
                   </a:lnTo>
                   <a:lnTo>
-                    <a:pt x="1338483" y="1535841"/>
+                    <a:pt x="1338483" y="1535842"/>
                   </a:lnTo>
                   <a:lnTo>
                     <a:pt x="1351868" y="1514262"/>
@@ -3211,31 +3211,31 @@
                     <a:pt x="1458946" y="1330008"/>
                   </a:lnTo>
                   <a:lnTo>
-                    <a:pt x="1472331" y="1305473"/>
+                    <a:pt x="1472331" y="1305474"/>
                   </a:lnTo>
                   <a:lnTo>
                     <a:pt x="1485716" y="1280595"/>
                   </a:lnTo>
                   <a:lnTo>
-                    <a:pt x="1499101" y="1255449"/>
+                    <a:pt x="1499101" y="1255450"/>
                   </a:lnTo>
                   <a:lnTo>
                     <a:pt x="1512486" y="1230047"/>
                   </a:lnTo>
                   <a:lnTo>
-                    <a:pt x="1525870" y="1204332"/>
+                    <a:pt x="1525870" y="1204333"/>
                   </a:lnTo>
                   <a:lnTo>
                     <a:pt x="1539255" y="1178373"/>
                   </a:lnTo>
                   <a:lnTo>
-                    <a:pt x="1552640" y="1152234"/>
-                  </a:lnTo>
-                  <a:lnTo>
-                    <a:pt x="1566025" y="1125937"/>
-                  </a:lnTo>
-                  <a:lnTo>
-                    <a:pt x="1579410" y="1099476"/>
+                    <a:pt x="1552640" y="1152235"/>
+                  </a:lnTo>
+                  <a:lnTo>
+                    <a:pt x="1566025" y="1125938"/>
+                  </a:lnTo>
+                  <a:lnTo>
+                    <a:pt x="1579410" y="1099477"/>
                   </a:lnTo>
                   <a:lnTo>
                     <a:pt x="1592795" y="1072932"/>
@@ -3244,13 +3244,13 @@
                     <a:pt x="1606179" y="1046352"/>
                   </a:lnTo>
                   <a:lnTo>
-                    <a:pt x="1619564" y="1019763"/>
+                    <a:pt x="1619564" y="1019764"/>
                   </a:lnTo>
                   <a:lnTo>
                     <a:pt x="1632949" y="993234"/>
                   </a:lnTo>
                   <a:lnTo>
-                    <a:pt x="1646334" y="966825"/>
+                    <a:pt x="1646334" y="966826"/>
                   </a:lnTo>
                   <a:lnTo>
                     <a:pt x="1659719" y="940563"/>
@@ -3259,16 +3259,16 @@
                     <a:pt x="1673104" y="914479"/>
                   </a:lnTo>
                   <a:lnTo>
-                    <a:pt x="1686488" y="888724"/>
-                  </a:lnTo>
-                  <a:lnTo>
-                    <a:pt x="1699873" y="863307"/>
+                    <a:pt x="1686488" y="888725"/>
+                  </a:lnTo>
+                  <a:lnTo>
+                    <a:pt x="1699873" y="863308"/>
                   </a:lnTo>
                   <a:lnTo>
                     <a:pt x="1713258" y="838231"/>
                   </a:lnTo>
                   <a:lnTo>
-                    <a:pt x="1726643" y="813527"/>
+                    <a:pt x="1726643" y="813528"/>
                   </a:lnTo>
                   <a:lnTo>
                     <a:pt x="1740028" y="789434"/>
@@ -3289,13 +3289,13 @@
                     <a:pt x="1806952" y="677698"/>
                   </a:lnTo>
                   <a:lnTo>
-                    <a:pt x="1820337" y="657367"/>
+                    <a:pt x="1820337" y="657368"/>
                   </a:lnTo>
                   <a:lnTo>
                     <a:pt x="1833722" y="637702"/>
                   </a:lnTo>
                   <a:lnTo>
-                    <a:pt x="1847106" y="619054"/>
+                    <a:pt x="1847106" y="619055"/>
                   </a:lnTo>
                   <a:lnTo>
                     <a:pt x="1860491" y="601139"/>
@@ -3307,7 +3307,7 @@
                     <a:pt x="1887261" y="567446"/>
                   </a:lnTo>
                   <a:lnTo>
-                    <a:pt x="1900646" y="552032"/>
+                    <a:pt x="1900646" y="552033"/>
                   </a:lnTo>
                   <a:lnTo>
                     <a:pt x="1914031" y="537331"/>
@@ -3373,19 +3373,19 @@
                     <a:pt x="2181727" y="361675"/>
                   </a:lnTo>
                   <a:lnTo>
-                    <a:pt x="2195112" y="355342"/>
+                    <a:pt x="2195112" y="355343"/>
                   </a:lnTo>
                   <a:lnTo>
                     <a:pt x="2208497" y="348901"/>
                   </a:lnTo>
                   <a:lnTo>
-                    <a:pt x="2221882" y="342270"/>
+                    <a:pt x="2221882" y="342271"/>
                   </a:lnTo>
                   <a:lnTo>
                     <a:pt x="2235267" y="335468"/>
                   </a:lnTo>
                   <a:lnTo>
-                    <a:pt x="2248651" y="328476"/>
+                    <a:pt x="2248651" y="328477"/>
                   </a:lnTo>
                   <a:lnTo>
                     <a:pt x="2262036" y="321236"/>
@@ -3394,7 +3394,7 @@
                     <a:pt x="2275421" y="313679"/>
                   </a:lnTo>
                   <a:lnTo>
-                    <a:pt x="2288806" y="305868"/>
+                    <a:pt x="2288806" y="305869"/>
                   </a:lnTo>
                   <a:lnTo>
                     <a:pt x="2302191" y="297796"/>
@@ -3409,7 +3409,7 @@
                     <a:pt x="2342345" y="271604"/>
                   </a:lnTo>
                   <a:lnTo>
-                    <a:pt x="2355730" y="262296"/>
+                    <a:pt x="2355730" y="262297"/>
                   </a:lnTo>
                   <a:lnTo>
                     <a:pt x="2369115" y="252660"/>
@@ -3565,7 +3565,7 @@
                     <a:pt x="3038357" y="175197"/>
                   </a:lnTo>
                   <a:lnTo>
-                    <a:pt x="3051741" y="190120"/>
+                    <a:pt x="3051741" y="190121"/>
                   </a:lnTo>
                   <a:lnTo>
                     <a:pt x="3065126" y="205220"/>
@@ -3586,25 +3586,25 @@
                     <a:pt x="3132050" y="280370"/>
                   </a:lnTo>
                   <a:lnTo>
-                    <a:pt x="3145435" y="294949"/>
-                  </a:lnTo>
-                  <a:lnTo>
-                    <a:pt x="3158820" y="309259"/>
-                  </a:lnTo>
-                  <a:lnTo>
-                    <a:pt x="3172205" y="323161"/>
-                  </a:lnTo>
-                  <a:lnTo>
-                    <a:pt x="3185590" y="336732"/>
+                    <a:pt x="3145435" y="294950"/>
+                  </a:lnTo>
+                  <a:lnTo>
+                    <a:pt x="3158820" y="309260"/>
+                  </a:lnTo>
+                  <a:lnTo>
+                    <a:pt x="3172205" y="323162"/>
+                  </a:lnTo>
+                  <a:lnTo>
+                    <a:pt x="3185590" y="336733"/>
                   </a:lnTo>
                   <a:lnTo>
                     <a:pt x="3198975" y="349955"/>
                   </a:lnTo>
                   <a:lnTo>
-                    <a:pt x="3212359" y="362751"/>
-                  </a:lnTo>
-                  <a:lnTo>
-                    <a:pt x="3225744" y="375011"/>
+                    <a:pt x="3212359" y="362752"/>
+                  </a:lnTo>
+                  <a:lnTo>
+                    <a:pt x="3225744" y="375012"/>
                   </a:lnTo>
                   <a:lnTo>
                     <a:pt x="3239129" y="386868"/>
@@ -3613,22 +3613,22 @@
                     <a:pt x="3252514" y="398319"/>
                   </a:lnTo>
                   <a:lnTo>
-                    <a:pt x="3265899" y="409292"/>
-                  </a:lnTo>
-                  <a:lnTo>
-                    <a:pt x="3279284" y="419737"/>
+                    <a:pt x="3265899" y="409293"/>
+                  </a:lnTo>
+                  <a:lnTo>
+                    <a:pt x="3279284" y="419738"/>
                   </a:lnTo>
                   <a:lnTo>
                     <a:pt x="3292668" y="429805"/>
                   </a:lnTo>
                   <a:lnTo>
-                    <a:pt x="3306053" y="439509"/>
-                  </a:lnTo>
-                  <a:lnTo>
-                    <a:pt x="3319438" y="448803"/>
-                  </a:lnTo>
-                  <a:lnTo>
-                    <a:pt x="3332823" y="457706"/>
+                    <a:pt x="3306053" y="439510"/>
+                  </a:lnTo>
+                  <a:lnTo>
+                    <a:pt x="3319438" y="448804"/>
+                  </a:lnTo>
+                  <a:lnTo>
+                    <a:pt x="3332823" y="457707"/>
                   </a:lnTo>
                   <a:lnTo>
                     <a:pt x="3346208" y="466353"/>
@@ -3640,25 +3640,25 @@
                     <a:pt x="3372977" y="482958"/>
                   </a:lnTo>
                   <a:lnTo>
-                    <a:pt x="3386362" y="490993"/>
-                  </a:lnTo>
-                  <a:lnTo>
-                    <a:pt x="3399747" y="498966"/>
-                  </a:lnTo>
-                  <a:lnTo>
-                    <a:pt x="3413132" y="506913"/>
+                    <a:pt x="3386362" y="490994"/>
+                  </a:lnTo>
+                  <a:lnTo>
+                    <a:pt x="3399747" y="498967"/>
+                  </a:lnTo>
+                  <a:lnTo>
+                    <a:pt x="3413132" y="506914"/>
                   </a:lnTo>
                   <a:lnTo>
                     <a:pt x="3426517" y="514900"/>
                   </a:lnTo>
                   <a:lnTo>
-                    <a:pt x="3439902" y="523026"/>
+                    <a:pt x="3439902" y="523027"/>
                   </a:lnTo>
                   <a:lnTo>
                     <a:pt x="3453286" y="531325"/>
                   </a:lnTo>
                   <a:lnTo>
-                    <a:pt x="3466671" y="539834"/>
+                    <a:pt x="3466671" y="539835"/>
                   </a:lnTo>
                   <a:lnTo>
                     <a:pt x="3480056" y="548695"/>
@@ -3670,7 +3670,7 @@
                     <a:pt x="3506826" y="567688"/>
                   </a:lnTo>
                   <a:lnTo>
-                    <a:pt x="3520211" y="577828"/>
+                    <a:pt x="3520211" y="577829"/>
                   </a:lnTo>
                   <a:lnTo>
                     <a:pt x="3533595" y="588620"/>
@@ -3688,7 +3688,7 @@
                     <a:pt x="3587135" y="638402"/>
                   </a:lnTo>
                   <a:lnTo>
-                    <a:pt x="3600520" y="652792"/>
+                    <a:pt x="3600520" y="652793"/>
                   </a:lnTo>
                   <a:lnTo>
                     <a:pt x="3613904" y="667898"/>
@@ -3700,7 +3700,7 @@
                     <a:pt x="3640674" y="700568"/>
                   </a:lnTo>
                   <a:lnTo>
-                    <a:pt x="3654059" y="718259"/>
+                    <a:pt x="3654059" y="718260"/>
                   </a:lnTo>
                   <a:lnTo>
                     <a:pt x="3667444" y="736688"/>
@@ -3742,10 +3742,10 @@
                     <a:pt x="3828062" y="1013123"/>
                   </a:lnTo>
                   <a:lnTo>
-                    <a:pt x="3841447" y="1039287"/>
-                  </a:lnTo>
-                  <a:lnTo>
-                    <a:pt x="3854831" y="1065723"/>
+                    <a:pt x="3841447" y="1039288"/>
+                  </a:lnTo>
+                  <a:lnTo>
+                    <a:pt x="3854831" y="1065724"/>
                   </a:lnTo>
                   <a:lnTo>
                     <a:pt x="3868216" y="1092271"/>
@@ -3769,10 +3769,10 @@
                     <a:pt x="3948525" y="1251021"/>
                   </a:lnTo>
                   <a:lnTo>
-                    <a:pt x="3961910" y="1276798"/>
-                  </a:lnTo>
-                  <a:lnTo>
-                    <a:pt x="3975295" y="1302284"/>
+                    <a:pt x="3961910" y="1276799"/>
+                  </a:lnTo>
+                  <a:lnTo>
+                    <a:pt x="3975295" y="1302285"/>
                   </a:lnTo>
                   <a:lnTo>
                     <a:pt x="3988680" y="1327456"/>
@@ -3787,7 +3787,7 @@
                     <a:pt x="4028834" y="1400384"/>
                   </a:lnTo>
                   <a:lnTo>
-                    <a:pt x="4042219" y="1423809"/>
+                    <a:pt x="4042219" y="1423810"/>
                   </a:lnTo>
                   <a:lnTo>
                     <a:pt x="4055604" y="1446769"/>
@@ -3802,7 +3802,7 @@
                     <a:pt x="4095758" y="1512262"/>
                   </a:lnTo>
                   <a:lnTo>
-                    <a:pt x="4109143" y="1533106"/>
+                    <a:pt x="4109143" y="1533107"/>
                   </a:lnTo>
                   <a:lnTo>
                     <a:pt x="4122528" y="1553278"/>
@@ -3820,7 +3820,7 @@
                     <a:pt x="4176067" y="1629047"/>
                   </a:lnTo>
                   <a:lnTo>
-                    <a:pt x="4189452" y="1646718"/>
+                    <a:pt x="4189452" y="1646719"/>
                   </a:lnTo>
                   <a:lnTo>
                     <a:pt x="4202837" y="1663966"/>
@@ -3829,7 +3829,7 @@
                     <a:pt x="4216222" y="1680741"/>
                   </a:lnTo>
                   <a:lnTo>
-                    <a:pt x="4229607" y="1696979"/>
+                    <a:pt x="4229607" y="1696980"/>
                   </a:lnTo>
                   <a:lnTo>
                     <a:pt x="4242992" y="1712842"/>
@@ -3844,10 +3844,10 @@
                     <a:pt x="4283146" y="1758055"/>
                   </a:lnTo>
                   <a:lnTo>
-                    <a:pt x="4296531" y="1772371"/>
-                  </a:lnTo>
-                  <a:lnTo>
-                    <a:pt x="4309916" y="1786378"/>
+                    <a:pt x="4296531" y="1772372"/>
+                  </a:lnTo>
+                  <a:lnTo>
+                    <a:pt x="4309916" y="1786379"/>
                   </a:lnTo>
                   <a:lnTo>
                     <a:pt x="4323301" y="1800028"/>
@@ -3859,7 +3859,7 @@
                     <a:pt x="4350070" y="1826313"/>
                   </a:lnTo>
                   <a:lnTo>
-                    <a:pt x="4363455" y="1839054"/>
+                    <a:pt x="4363455" y="1839055"/>
                   </a:lnTo>
                   <a:lnTo>
                     <a:pt x="4376840" y="1851481"/>
@@ -3868,7 +3868,7 @@
                     <a:pt x="4390225" y="1863589"/>
                   </a:lnTo>
                   <a:lnTo>
-                    <a:pt x="4403610" y="1875456"/>
+                    <a:pt x="4403610" y="1875457"/>
                   </a:lnTo>
                   <a:lnTo>
                     <a:pt x="4416994" y="1887087"/>
@@ -3880,7 +3880,7 @@
                     <a:pt x="4443764" y="1909476"/>
                   </a:lnTo>
                   <a:lnTo>
-                    <a:pt x="4457149" y="1920302"/>
+                    <a:pt x="4457149" y="1920303"/>
                   </a:lnTo>
                   <a:lnTo>
                     <a:pt x="4470534" y="1930905"/>
@@ -3898,13 +3898,13 @@
                     <a:pt x="4524073" y="1970713"/>
                   </a:lnTo>
                   <a:lnTo>
-                    <a:pt x="4537458" y="1980041"/>
+                    <a:pt x="4537458" y="1980042"/>
                   </a:lnTo>
                   <a:lnTo>
                     <a:pt x="4550843" y="1989111"/>
                   </a:lnTo>
                   <a:lnTo>
-                    <a:pt x="4564228" y="1997967"/>
+                    <a:pt x="4564228" y="1997968"/>
                   </a:lnTo>
                   <a:lnTo>
                     <a:pt x="4577612" y="2006612"/>
@@ -3922,7 +3922,7 @@
                     <a:pt x="4631152" y="2038744"/>
                   </a:lnTo>
                   <a:lnTo>
-                    <a:pt x="4644537" y="2046203"/>
+                    <a:pt x="4644537" y="2046204"/>
                   </a:lnTo>
                   <a:lnTo>
                     <a:pt x="4657921" y="2053449"/>
@@ -3937,7 +3937,7 @@
                     <a:pt x="4698076" y="2074071"/>
                   </a:lnTo>
                   <a:lnTo>
-                    <a:pt x="4711461" y="2080562"/>
+                    <a:pt x="4711461" y="2080563"/>
                   </a:lnTo>
                   <a:lnTo>
                     <a:pt x="4724846" y="2086910"/>
@@ -3961,7 +3961,7 @@
                     <a:pt x="4805155" y="2122258"/>
                   </a:lnTo>
                   <a:lnTo>
-                    <a:pt x="4818539" y="2127830"/>
+                    <a:pt x="4818539" y="2127831"/>
                   </a:lnTo>
                   <a:lnTo>
                     <a:pt x="4831924" y="2133361"/>
@@ -3985,7 +3985,7 @@
                     <a:pt x="4912233" y="2166418"/>
                   </a:lnTo>
                   <a:lnTo>
-                    <a:pt x="4925618" y="2172064"/>
+                    <a:pt x="4925618" y="2172065"/>
                   </a:lnTo>
                   <a:lnTo>
                     <a:pt x="4939003" y="2177780"/>
@@ -3997,7 +3997,7 @@
                     <a:pt x="4965773" y="2189509"/>
                   </a:lnTo>
                   <a:lnTo>
-                    <a:pt x="4979157" y="2195551"/>
+                    <a:pt x="4979157" y="2195552"/>
                   </a:lnTo>
                   <a:lnTo>
                     <a:pt x="4992542" y="2201708"/>
@@ -4012,7 +4012,7 @@
                     <a:pt x="5032697" y="2221087"/>
                   </a:lnTo>
                   <a:lnTo>
-                    <a:pt x="5046082" y="2227851"/>
+                    <a:pt x="5046082" y="2227852"/>
                   </a:lnTo>
                   <a:lnTo>
                     <a:pt x="5059466" y="2234775"/>
@@ -4039,16 +4039,16 @@
                     <a:pt x="5153160" y="2288377"/>
                   </a:lnTo>
                   <a:lnTo>
-                    <a:pt x="5166545" y="2296712"/>
-                  </a:lnTo>
-                  <a:lnTo>
-                    <a:pt x="5179930" y="2305244"/>
+                    <a:pt x="5166545" y="2296713"/>
+                  </a:lnTo>
+                  <a:lnTo>
+                    <a:pt x="5179930" y="2305245"/>
                   </a:lnTo>
                   <a:lnTo>
                     <a:pt x="5193315" y="2313908"/>
                   </a:lnTo>
                   <a:lnTo>
-                    <a:pt x="5206700" y="2322698"/>
+                    <a:pt x="5206700" y="2322699"/>
                   </a:lnTo>
                   <a:lnTo>
                     <a:pt x="5220084" y="2331625"/>
@@ -4060,10 +4060,10 @@
                     <a:pt x="5246854" y="2349856"/>
                   </a:lnTo>
                   <a:lnTo>
-                    <a:pt x="5260239" y="2359101"/>
-                  </a:lnTo>
-                  <a:lnTo>
-                    <a:pt x="5273624" y="2368431"/>
+                    <a:pt x="5260239" y="2359102"/>
+                  </a:lnTo>
+                  <a:lnTo>
+                    <a:pt x="5273624" y="2368432"/>
                   </a:lnTo>
                   <a:lnTo>
                     <a:pt x="5287009" y="2377834"/>
@@ -4072,7 +4072,7 @@
                     <a:pt x="5300393" y="2387274"/>
                   </a:lnTo>
                   <a:lnTo>
-                    <a:pt x="5313778" y="2396741"/>
+                    <a:pt x="5313778" y="2396742"/>
                   </a:lnTo>
                   <a:lnTo>
                     <a:pt x="5327163" y="2406226"/>
@@ -4105,7 +4105,7 @@
                     <a:pt x="5447627" y="2489133"/>
                   </a:lnTo>
                   <a:lnTo>
-                    <a:pt x="5461011" y="2497749"/>
+                    <a:pt x="5461011" y="2497750"/>
                   </a:lnTo>
                   <a:lnTo>
                     <a:pt x="5474396" y="2506210"/>
@@ -4123,7 +4123,7 @@
                     <a:pt x="5527936" y="2537885"/>
                   </a:lnTo>
                   <a:lnTo>
-                    <a:pt x="5541320" y="2545211"/>
+                    <a:pt x="5541320" y="2545212"/>
                   </a:lnTo>
                   <a:lnTo>
                     <a:pt x="5554705" y="2552263"/>
@@ -4162,7 +4162,7 @@
                     <a:pt x="5701938" y="2611550"/>
                   </a:lnTo>
                   <a:lnTo>
-                    <a:pt x="5715323" y="2615170"/>
+                    <a:pt x="5715323" y="2615171"/>
                   </a:lnTo>
                   <a:lnTo>
                     <a:pt x="5728708" y="2618542"/>
@@ -4174,7 +4174,7 @@
                     <a:pt x="5755478" y="2624456"/>
                   </a:lnTo>
                   <a:lnTo>
-                    <a:pt x="5768863" y="2626991"/>
+                    <a:pt x="5768863" y="2626992"/>
                   </a:lnTo>
                   <a:lnTo>
                     <a:pt x="5782247" y="2629304"/>
@@ -4183,7 +4183,7 @@
                     <a:pt x="5795632" y="2631398"/>
                   </a:lnTo>
                   <a:lnTo>
-                    <a:pt x="5809017" y="2633194"/>
+                    <a:pt x="5809017" y="2633195"/>
                   </a:lnTo>
                   <a:lnTo>
                     <a:pt x="5822402" y="2634783"/>
@@ -4192,7 +4192,7 @@
                     <a:pt x="5835787" y="2636186"/>
                   </a:lnTo>
                   <a:lnTo>
-                    <a:pt x="5849172" y="2637410"/>
+                    <a:pt x="5849172" y="2637411"/>
                   </a:lnTo>
                   <a:lnTo>
                     <a:pt x="5862556" y="2638394"/>
@@ -4210,7 +4210,7 @@
                     <a:pt x="5916096" y="2640857"/>
                   </a:lnTo>
                   <a:lnTo>
-                    <a:pt x="5929481" y="2641144"/>
+                    <a:pt x="5929481" y="2641145"/>
                   </a:lnTo>
                   <a:lnTo>
                     <a:pt x="5942865" y="2641343"/>
@@ -4219,7 +4219,7 @@
                     <a:pt x="5956250" y="2641461"/>
                   </a:lnTo>
                   <a:lnTo>
-                    <a:pt x="5969635" y="2641484"/>
+                    <a:pt x="5969635" y="2641485"/>
                   </a:lnTo>
                   <a:lnTo>
                     <a:pt x="5983020" y="2641462"/>
@@ -4231,7 +4231,7 @@
                     <a:pt x="6009790" y="2641309"/>
                   </a:lnTo>
                   <a:lnTo>
-                    <a:pt x="6023174" y="2641196"/>
+                    <a:pt x="6023174" y="2641197"/>
                   </a:lnTo>
                   <a:lnTo>
                     <a:pt x="6036559" y="2641085"/>
@@ -4243,7 +4243,7 @@
                     <a:pt x="6063329" y="2640892"/>
                   </a:lnTo>
                   <a:lnTo>
-                    <a:pt x="6076714" y="2640843"/>
+                    <a:pt x="6076714" y="2640844"/>
                   </a:lnTo>
                   <a:lnTo>
                     <a:pt x="6090099" y="2640834"/>
@@ -4252,7 +4252,7 @@
                     <a:pt x="6103483" y="2640868"/>
                   </a:lnTo>
                   <a:lnTo>
-                    <a:pt x="6116868" y="2640955"/>
+                    <a:pt x="6116868" y="2640956"/>
                   </a:lnTo>
                   <a:lnTo>
                     <a:pt x="6130253" y="2641126"/>
@@ -4279,40 +4279,40 @@
                     <a:pt x="6223947" y="2644463"/>
                   </a:lnTo>
                   <a:lnTo>
-                    <a:pt x="6237332" y="2645297"/>
+                    <a:pt x="6237332" y="2645298"/>
                   </a:lnTo>
                   <a:lnTo>
                     <a:pt x="6250717" y="2646207"/>
                   </a:lnTo>
                   <a:lnTo>
-                    <a:pt x="6264101" y="2647190"/>
+                    <a:pt x="6264101" y="2647191"/>
                   </a:lnTo>
                   <a:lnTo>
                     <a:pt x="6277486" y="2648257"/>
                   </a:lnTo>
                   <a:lnTo>
-                    <a:pt x="6290871" y="2649413"/>
+                    <a:pt x="6290871" y="2649414"/>
                   </a:lnTo>
                   <a:lnTo>
                     <a:pt x="6304256" y="2650632"/>
                   </a:lnTo>
                   <a:lnTo>
-                    <a:pt x="6317641" y="2651908"/>
+                    <a:pt x="6317641" y="2651909"/>
                   </a:lnTo>
                   <a:lnTo>
                     <a:pt x="6331026" y="2653250"/>
                   </a:lnTo>
                   <a:lnTo>
-                    <a:pt x="6344410" y="2654653"/>
-                  </a:lnTo>
-                  <a:lnTo>
-                    <a:pt x="6357795" y="2656097"/>
+                    <a:pt x="6344410" y="2654654"/>
+                  </a:lnTo>
+                  <a:lnTo>
+                    <a:pt x="6357795" y="2656098"/>
                   </a:lnTo>
                   <a:lnTo>
                     <a:pt x="6371180" y="2657578"/>
                   </a:lnTo>
                   <a:lnTo>
-                    <a:pt x="6384565" y="2659095"/>
+                    <a:pt x="6384565" y="2659096"/>
                   </a:lnTo>
                   <a:lnTo>
                     <a:pt x="6397950" y="2660642"/>
@@ -4324,19 +4324,19 @@
                     <a:pt x="6424719" y="2663777"/>
                   </a:lnTo>
                   <a:lnTo>
-                    <a:pt x="6438104" y="2665357"/>
+                    <a:pt x="6438104" y="2665358"/>
                   </a:lnTo>
                   <a:lnTo>
                     <a:pt x="6451489" y="2666935"/>
                   </a:lnTo>
                   <a:lnTo>
-                    <a:pt x="6464874" y="2668503"/>
+                    <a:pt x="6464874" y="2668504"/>
                   </a:lnTo>
                   <a:lnTo>
                     <a:pt x="6478259" y="2670061"/>
                   </a:lnTo>
                   <a:lnTo>
-                    <a:pt x="6491644" y="2671596"/>
+                    <a:pt x="6491644" y="2671597"/>
                   </a:lnTo>
                   <a:lnTo>
                     <a:pt x="6505028" y="2673104"/>
@@ -4354,16 +4354,16 @@
                     <a:pt x="6558568" y="2678807"/>
                   </a:lnTo>
                   <a:lnTo>
-                    <a:pt x="6571953" y="2680132"/>
-                  </a:lnTo>
-                  <a:lnTo>
-                    <a:pt x="6585337" y="2681418"/>
+                    <a:pt x="6571953" y="2680133"/>
+                  </a:lnTo>
+                  <a:lnTo>
+                    <a:pt x="6585337" y="2681419"/>
                   </a:lnTo>
                   <a:lnTo>
                     <a:pt x="6598722" y="2682650"/>
                   </a:lnTo>
                   <a:lnTo>
-                    <a:pt x="6612107" y="2683832"/>
+                    <a:pt x="6612107" y="2683833"/>
                   </a:lnTo>
                   <a:lnTo>
                     <a:pt x="6625492" y="2684973"/>
@@ -4381,13 +4381,13 @@
                     <a:pt x="6679031" y="2689073"/>
                   </a:lnTo>
                   <a:lnTo>
-                    <a:pt x="6692416" y="2689995"/>
+                    <a:pt x="6692416" y="2689996"/>
                   </a:lnTo>
                   <a:lnTo>
                     <a:pt x="6705801" y="2690870"/>
                   </a:lnTo>
                   <a:lnTo>
-                    <a:pt x="6719186" y="2691709"/>
+                    <a:pt x="6719186" y="2691710"/>
                   </a:lnTo>
                   <a:lnTo>
                     <a:pt x="6732571" y="2692519"/>
@@ -4405,7 +4405,7 @@
                     <a:pt x="6786110" y="2695477"/>
                   </a:lnTo>
                   <a:lnTo>
-                    <a:pt x="6799495" y="2696165"/>
+                    <a:pt x="6799495" y="2696166"/>
                   </a:lnTo>
                   <a:lnTo>
                     <a:pt x="6812880" y="2696834"/>
@@ -5987,7 +5987,7 @@
                     <a:pt x="0" y="2625284"/>
                   </a:moveTo>
                   <a:lnTo>
-                    <a:pt x="13384" y="2619955"/>
+                    <a:pt x="13384" y="2619956"/>
                   </a:lnTo>
                   <a:lnTo>
                     <a:pt x="26769" y="2614470"/>
@@ -6008,7 +6008,7 @@
                     <a:pt x="93693" y="2584440"/>
                   </a:lnTo>
                   <a:lnTo>
-                    <a:pt x="107078" y="2577930"/>
+                    <a:pt x="107078" y="2577931"/>
                   </a:lnTo>
                   <a:lnTo>
                     <a:pt x="120463" y="2571295"/>
@@ -6032,7 +6032,7 @@
                     <a:pt x="200772" y="2529001"/>
                   </a:lnTo>
                   <a:lnTo>
-                    <a:pt x="214157" y="2521623"/>
+                    <a:pt x="214157" y="2521624"/>
                   </a:lnTo>
                   <a:lnTo>
                     <a:pt x="227542" y="2514199"/>
@@ -6044,7 +6044,7 @@
                     <a:pt x="254311" y="2499235"/>
                   </a:lnTo>
                   <a:lnTo>
-                    <a:pt x="267696" y="2491719"/>
+                    <a:pt x="267696" y="2491720"/>
                   </a:lnTo>
                   <a:lnTo>
                     <a:pt x="281081" y="2484205"/>
@@ -6056,7 +6056,7 @@
                     <a:pt x="307851" y="2469218"/>
                   </a:lnTo>
                   <a:lnTo>
-                    <a:pt x="321235" y="2461782"/>
+                    <a:pt x="321235" y="2461783"/>
                   </a:lnTo>
                   <a:lnTo>
                     <a:pt x="334620" y="2454394"/>
@@ -6065,13 +6065,13 @@
                     <a:pt x="348005" y="2447058"/>
                   </a:lnTo>
                   <a:lnTo>
-                    <a:pt x="361390" y="2439799"/>
+                    <a:pt x="361390" y="2439800"/>
                   </a:lnTo>
                   <a:lnTo>
                     <a:pt x="374775" y="2432634"/>
                   </a:lnTo>
                   <a:lnTo>
-                    <a:pt x="388160" y="2425548"/>
+                    <a:pt x="388160" y="2425549"/>
                   </a:lnTo>
                   <a:lnTo>
                     <a:pt x="401544" y="2418546"/>
@@ -6083,7 +6083,7 @@
                     <a:pt x="428314" y="2404878"/>
                   </a:lnTo>
                   <a:lnTo>
-                    <a:pt x="441699" y="2398192"/>
+                    <a:pt x="441699" y="2398193"/>
                   </a:lnTo>
                   <a:lnTo>
                     <a:pt x="455084" y="2391598"/>
@@ -6104,7 +6104,7 @@
                     <a:pt x="522008" y="2360041"/>
                   </a:lnTo>
                   <a:lnTo>
-                    <a:pt x="535393" y="2353934"/>
+                    <a:pt x="535393" y="2353935"/>
                   </a:lnTo>
                   <a:lnTo>
                     <a:pt x="548778" y="2347857"/>
@@ -6125,7 +6125,7 @@
                     <a:pt x="615702" y="2317326"/>
                   </a:lnTo>
                   <a:lnTo>
-                    <a:pt x="629087" y="2311020"/>
+                    <a:pt x="629087" y="2311021"/>
                   </a:lnTo>
                   <a:lnTo>
                     <a:pt x="642471" y="2304585"/>
@@ -6146,10 +6146,10 @@
                     <a:pt x="709396" y="2269687"/>
                   </a:lnTo>
                   <a:lnTo>
-                    <a:pt x="722780" y="2262010"/>
-                  </a:lnTo>
-                  <a:lnTo>
-                    <a:pt x="736165" y="2253948"/>
+                    <a:pt x="722780" y="2262011"/>
+                  </a:lnTo>
+                  <a:lnTo>
+                    <a:pt x="736165" y="2253949"/>
                   </a:lnTo>
                   <a:lnTo>
                     <a:pt x="749550" y="2245563"/>
@@ -6176,10 +6176,10 @@
                     <a:pt x="843244" y="2176291"/>
                   </a:lnTo>
                   <a:lnTo>
-                    <a:pt x="856629" y="2164670"/>
-                  </a:lnTo>
-                  <a:lnTo>
-                    <a:pt x="870014" y="2152658"/>
+                    <a:pt x="856629" y="2164671"/>
+                  </a:lnTo>
+                  <a:lnTo>
+                    <a:pt x="870014" y="2152659"/>
                   </a:lnTo>
                   <a:lnTo>
                     <a:pt x="883398" y="2140255"/>
@@ -6191,7 +6191,7 @@
                     <a:pt x="910168" y="2113888"/>
                   </a:lnTo>
                   <a:lnTo>
-                    <a:pt x="923553" y="2100135"/>
+                    <a:pt x="923553" y="2100136"/>
                   </a:lnTo>
                   <a:lnTo>
                     <a:pt x="936938" y="2086003"/>
@@ -6203,19 +6203,19 @@
                     <a:pt x="963707" y="2056329"/>
                   </a:lnTo>
                   <a:lnTo>
-                    <a:pt x="977092" y="2040989"/>
+                    <a:pt x="977092" y="2040990"/>
                   </a:lnTo>
                   <a:lnTo>
                     <a:pt x="990477" y="2025313"/>
                   </a:lnTo>
                   <a:lnTo>
-                    <a:pt x="1003862" y="2009195"/>
+                    <a:pt x="1003862" y="2009196"/>
                   </a:lnTo>
                   <a:lnTo>
                     <a:pt x="1017247" y="1992798"/>
                   </a:lnTo>
                   <a:lnTo>
-                    <a:pt x="1030632" y="1976132"/>
+                    <a:pt x="1030632" y="1976133"/>
                   </a:lnTo>
                   <a:lnTo>
                     <a:pt x="1044016" y="1959192"/>
@@ -6230,13 +6230,13 @@
                     <a:pt x="1084171" y="1906726"/>
                   </a:lnTo>
                   <a:lnTo>
-                    <a:pt x="1097556" y="1888817"/>
+                    <a:pt x="1097556" y="1888818"/>
                   </a:lnTo>
                   <a:lnTo>
                     <a:pt x="1110941" y="1870660"/>
                   </a:lnTo>
                   <a:lnTo>
-                    <a:pt x="1124325" y="1852340"/>
+                    <a:pt x="1124325" y="1852341"/>
                   </a:lnTo>
                   <a:lnTo>
                     <a:pt x="1137710" y="1833864"/>
@@ -6245,7 +6245,7 @@
                     <a:pt x="1151095" y="1815219"/>
                   </a:lnTo>
                   <a:lnTo>
-                    <a:pt x="1164480" y="1796376"/>
+                    <a:pt x="1164480" y="1796377"/>
                   </a:lnTo>
                   <a:lnTo>
                     <a:pt x="1177865" y="1777396"/>
@@ -6257,13 +6257,13 @@
                     <a:pt x="1204634" y="1739001"/>
                   </a:lnTo>
                   <a:lnTo>
-                    <a:pt x="1218019" y="1719532"/>
+                    <a:pt x="1218019" y="1719533"/>
                   </a:lnTo>
                   <a:lnTo>
                     <a:pt x="1231404" y="1699917"/>
                   </a:lnTo>
                   <a:lnTo>
-                    <a:pt x="1244789" y="1680149"/>
+                    <a:pt x="1244789" y="1680150"/>
                   </a:lnTo>
                   <a:lnTo>
                     <a:pt x="1258174" y="1660195"/>
@@ -6284,7 +6284,7 @@
                     <a:pt x="1325098" y="1557176"/>
                   </a:lnTo>
                   <a:lnTo>
-                    <a:pt x="1338483" y="1535841"/>
+                    <a:pt x="1338483" y="1535842"/>
                   </a:lnTo>
                   <a:lnTo>
                     <a:pt x="1351868" y="1514262"/>
@@ -6314,31 +6314,31 @@
                     <a:pt x="1458946" y="1330008"/>
                   </a:lnTo>
                   <a:lnTo>
-                    <a:pt x="1472331" y="1305473"/>
+                    <a:pt x="1472331" y="1305474"/>
                   </a:lnTo>
                   <a:lnTo>
                     <a:pt x="1485716" y="1280595"/>
                   </a:lnTo>
                   <a:lnTo>
-                    <a:pt x="1499101" y="1255449"/>
+                    <a:pt x="1499101" y="1255450"/>
                   </a:lnTo>
                   <a:lnTo>
                     <a:pt x="1512486" y="1230047"/>
                   </a:lnTo>
                   <a:lnTo>
-                    <a:pt x="1525870" y="1204332"/>
+                    <a:pt x="1525870" y="1204333"/>
                   </a:lnTo>
                   <a:lnTo>
                     <a:pt x="1539255" y="1178373"/>
                   </a:lnTo>
                   <a:lnTo>
-                    <a:pt x="1552640" y="1152234"/>
-                  </a:lnTo>
-                  <a:lnTo>
-                    <a:pt x="1566025" y="1125937"/>
-                  </a:lnTo>
-                  <a:lnTo>
-                    <a:pt x="1579410" y="1099476"/>
+                    <a:pt x="1552640" y="1152235"/>
+                  </a:lnTo>
+                  <a:lnTo>
+                    <a:pt x="1566025" y="1125938"/>
+                  </a:lnTo>
+                  <a:lnTo>
+                    <a:pt x="1579410" y="1099477"/>
                   </a:lnTo>
                   <a:lnTo>
                     <a:pt x="1592795" y="1072932"/>
@@ -6347,13 +6347,13 @@
                     <a:pt x="1606179" y="1046352"/>
                   </a:lnTo>
                   <a:lnTo>
-                    <a:pt x="1619564" y="1019763"/>
+                    <a:pt x="1619564" y="1019764"/>
                   </a:lnTo>
                   <a:lnTo>
                     <a:pt x="1632949" y="993234"/>
                   </a:lnTo>
                   <a:lnTo>
-                    <a:pt x="1646334" y="966825"/>
+                    <a:pt x="1646334" y="966826"/>
                   </a:lnTo>
                   <a:lnTo>
                     <a:pt x="1659719" y="940563"/>
@@ -6362,16 +6362,16 @@
                     <a:pt x="1673104" y="914479"/>
                   </a:lnTo>
                   <a:lnTo>
-                    <a:pt x="1686488" y="888724"/>
-                  </a:lnTo>
-                  <a:lnTo>
-                    <a:pt x="1699873" y="863307"/>
+                    <a:pt x="1686488" y="888725"/>
+                  </a:lnTo>
+                  <a:lnTo>
+                    <a:pt x="1699873" y="863308"/>
                   </a:lnTo>
                   <a:lnTo>
                     <a:pt x="1713258" y="838231"/>
                   </a:lnTo>
                   <a:lnTo>
-                    <a:pt x="1726643" y="813527"/>
+                    <a:pt x="1726643" y="813528"/>
                   </a:lnTo>
                   <a:lnTo>
                     <a:pt x="1740028" y="789434"/>
@@ -6392,13 +6392,13 @@
                     <a:pt x="1806952" y="677698"/>
                   </a:lnTo>
                   <a:lnTo>
-                    <a:pt x="1820337" y="657367"/>
+                    <a:pt x="1820337" y="657368"/>
                   </a:lnTo>
                   <a:lnTo>
                     <a:pt x="1833722" y="637702"/>
                   </a:lnTo>
                   <a:lnTo>
-                    <a:pt x="1847106" y="619054"/>
+                    <a:pt x="1847106" y="619055"/>
                   </a:lnTo>
                   <a:lnTo>
                     <a:pt x="1860491" y="601139"/>
@@ -6410,7 +6410,7 @@
                     <a:pt x="1887261" y="567446"/>
                   </a:lnTo>
                   <a:lnTo>
-                    <a:pt x="1900646" y="552032"/>
+                    <a:pt x="1900646" y="552033"/>
                   </a:lnTo>
                   <a:lnTo>
                     <a:pt x="1914031" y="537331"/>
@@ -6476,19 +6476,19 @@
                     <a:pt x="2181727" y="361675"/>
                   </a:lnTo>
                   <a:lnTo>
-                    <a:pt x="2195112" y="355342"/>
+                    <a:pt x="2195112" y="355343"/>
                   </a:lnTo>
                   <a:lnTo>
                     <a:pt x="2208497" y="348901"/>
                   </a:lnTo>
                   <a:lnTo>
-                    <a:pt x="2221882" y="342270"/>
+                    <a:pt x="2221882" y="342271"/>
                   </a:lnTo>
                   <a:lnTo>
                     <a:pt x="2235267" y="335468"/>
                   </a:lnTo>
                   <a:lnTo>
-                    <a:pt x="2248651" y="328476"/>
+                    <a:pt x="2248651" y="328477"/>
                   </a:lnTo>
                   <a:lnTo>
                     <a:pt x="2262036" y="321236"/>
@@ -6497,7 +6497,7 @@
                     <a:pt x="2275421" y="313679"/>
                   </a:lnTo>
                   <a:lnTo>
-                    <a:pt x="2288806" y="305868"/>
+                    <a:pt x="2288806" y="305869"/>
                   </a:lnTo>
                   <a:lnTo>
                     <a:pt x="2302191" y="297796"/>
@@ -6512,7 +6512,7 @@
                     <a:pt x="2342345" y="271604"/>
                   </a:lnTo>
                   <a:lnTo>
-                    <a:pt x="2355730" y="262296"/>
+                    <a:pt x="2355730" y="262297"/>
                   </a:lnTo>
                   <a:lnTo>
                     <a:pt x="2369115" y="252660"/>
@@ -6668,7 +6668,7 @@
                     <a:pt x="3038357" y="175197"/>
                   </a:lnTo>
                   <a:lnTo>
-                    <a:pt x="3051741" y="190120"/>
+                    <a:pt x="3051741" y="190121"/>
                   </a:lnTo>
                   <a:lnTo>
                     <a:pt x="3065126" y="205220"/>
@@ -6689,25 +6689,25 @@
                     <a:pt x="3132050" y="280370"/>
                   </a:lnTo>
                   <a:lnTo>
-                    <a:pt x="3145435" y="294949"/>
-                  </a:lnTo>
-                  <a:lnTo>
-                    <a:pt x="3158820" y="309259"/>
-                  </a:lnTo>
-                  <a:lnTo>
-                    <a:pt x="3172205" y="323161"/>
-                  </a:lnTo>
-                  <a:lnTo>
-                    <a:pt x="3185590" y="336732"/>
+                    <a:pt x="3145435" y="294950"/>
+                  </a:lnTo>
+                  <a:lnTo>
+                    <a:pt x="3158820" y="309260"/>
+                  </a:lnTo>
+                  <a:lnTo>
+                    <a:pt x="3172205" y="323162"/>
+                  </a:lnTo>
+                  <a:lnTo>
+                    <a:pt x="3185590" y="336733"/>
                   </a:lnTo>
                   <a:lnTo>
                     <a:pt x="3198975" y="349955"/>
                   </a:lnTo>
                   <a:lnTo>
-                    <a:pt x="3212359" y="362751"/>
-                  </a:lnTo>
-                  <a:lnTo>
-                    <a:pt x="3225744" y="375011"/>
+                    <a:pt x="3212359" y="362752"/>
+                  </a:lnTo>
+                  <a:lnTo>
+                    <a:pt x="3225744" y="375012"/>
                   </a:lnTo>
                   <a:lnTo>
                     <a:pt x="3239129" y="386868"/>
@@ -6716,22 +6716,22 @@
                     <a:pt x="3252514" y="398319"/>
                   </a:lnTo>
                   <a:lnTo>
-                    <a:pt x="3265899" y="409292"/>
-                  </a:lnTo>
-                  <a:lnTo>
-                    <a:pt x="3279284" y="419737"/>
+                    <a:pt x="3265899" y="409293"/>
+                  </a:lnTo>
+                  <a:lnTo>
+                    <a:pt x="3279284" y="419738"/>
                   </a:lnTo>
                   <a:lnTo>
                     <a:pt x="3292668" y="429805"/>
                   </a:lnTo>
                   <a:lnTo>
-                    <a:pt x="3306053" y="439509"/>
-                  </a:lnTo>
-                  <a:lnTo>
-                    <a:pt x="3319438" y="448803"/>
-                  </a:lnTo>
-                  <a:lnTo>
-                    <a:pt x="3332823" y="457706"/>
+                    <a:pt x="3306053" y="439510"/>
+                  </a:lnTo>
+                  <a:lnTo>
+                    <a:pt x="3319438" y="448804"/>
+                  </a:lnTo>
+                  <a:lnTo>
+                    <a:pt x="3332823" y="457707"/>
                   </a:lnTo>
                   <a:lnTo>
                     <a:pt x="3346208" y="466353"/>
@@ -6743,25 +6743,25 @@
                     <a:pt x="3372977" y="482958"/>
                   </a:lnTo>
                   <a:lnTo>
-                    <a:pt x="3386362" y="490993"/>
-                  </a:lnTo>
-                  <a:lnTo>
-                    <a:pt x="3399747" y="498966"/>
-                  </a:lnTo>
-                  <a:lnTo>
-                    <a:pt x="3413132" y="506913"/>
+                    <a:pt x="3386362" y="490994"/>
+                  </a:lnTo>
+                  <a:lnTo>
+                    <a:pt x="3399747" y="498967"/>
+                  </a:lnTo>
+                  <a:lnTo>
+                    <a:pt x="3413132" y="506914"/>
                   </a:lnTo>
                   <a:lnTo>
                     <a:pt x="3426517" y="514900"/>
                   </a:lnTo>
                   <a:lnTo>
-                    <a:pt x="3439902" y="523026"/>
+                    <a:pt x="3439902" y="523027"/>
                   </a:lnTo>
                   <a:lnTo>
                     <a:pt x="3453286" y="531325"/>
                   </a:lnTo>
                   <a:lnTo>
-                    <a:pt x="3466671" y="539834"/>
+                    <a:pt x="3466671" y="539835"/>
                   </a:lnTo>
                   <a:lnTo>
                     <a:pt x="3480056" y="548695"/>
@@ -6773,7 +6773,7 @@
                     <a:pt x="3506826" y="567688"/>
                   </a:lnTo>
                   <a:lnTo>
-                    <a:pt x="3520211" y="577828"/>
+                    <a:pt x="3520211" y="577829"/>
                   </a:lnTo>
                   <a:lnTo>
                     <a:pt x="3533595" y="588620"/>
@@ -6791,7 +6791,7 @@
                     <a:pt x="3587135" y="638402"/>
                   </a:lnTo>
                   <a:lnTo>
-                    <a:pt x="3600520" y="652792"/>
+                    <a:pt x="3600520" y="652793"/>
                   </a:lnTo>
                   <a:lnTo>
                     <a:pt x="3613904" y="667898"/>
@@ -6803,7 +6803,7 @@
                     <a:pt x="3640674" y="700568"/>
                   </a:lnTo>
                   <a:lnTo>
-                    <a:pt x="3654059" y="718259"/>
+                    <a:pt x="3654059" y="718260"/>
                   </a:lnTo>
                   <a:lnTo>
                     <a:pt x="3667444" y="736688"/>
@@ -6845,10 +6845,10 @@
                     <a:pt x="3828062" y="1013123"/>
                   </a:lnTo>
                   <a:lnTo>
-                    <a:pt x="3841447" y="1039287"/>
-                  </a:lnTo>
-                  <a:lnTo>
-                    <a:pt x="3854831" y="1065723"/>
+                    <a:pt x="3841447" y="1039288"/>
+                  </a:lnTo>
+                  <a:lnTo>
+                    <a:pt x="3854831" y="1065724"/>
                   </a:lnTo>
                   <a:lnTo>
                     <a:pt x="3868216" y="1092271"/>
@@ -6872,10 +6872,10 @@
                     <a:pt x="3948525" y="1251021"/>
                   </a:lnTo>
                   <a:lnTo>
-                    <a:pt x="3961910" y="1276798"/>
-                  </a:lnTo>
-                  <a:lnTo>
-                    <a:pt x="3975295" y="1302284"/>
+                    <a:pt x="3961910" y="1276799"/>
+                  </a:lnTo>
+                  <a:lnTo>
+                    <a:pt x="3975295" y="1302285"/>
                   </a:lnTo>
                   <a:lnTo>
                     <a:pt x="3988680" y="1327456"/>
@@ -6890,7 +6890,7 @@
                     <a:pt x="4028834" y="1400384"/>
                   </a:lnTo>
                   <a:lnTo>
-                    <a:pt x="4042219" y="1423809"/>
+                    <a:pt x="4042219" y="1423810"/>
                   </a:lnTo>
                   <a:lnTo>
                     <a:pt x="4055604" y="1446769"/>
@@ -6905,7 +6905,7 @@
                     <a:pt x="4095758" y="1512262"/>
                   </a:lnTo>
                   <a:lnTo>
-                    <a:pt x="4109143" y="1533106"/>
+                    <a:pt x="4109143" y="1533107"/>
                   </a:lnTo>
                   <a:lnTo>
                     <a:pt x="4122528" y="1553278"/>
@@ -6923,7 +6923,7 @@
                     <a:pt x="4176067" y="1629047"/>
                   </a:lnTo>
                   <a:lnTo>
-                    <a:pt x="4189452" y="1646718"/>
+                    <a:pt x="4189452" y="1646719"/>
                   </a:lnTo>
                   <a:lnTo>
                     <a:pt x="4202837" y="1663966"/>
@@ -6932,7 +6932,7 @@
                     <a:pt x="4216222" y="1680741"/>
                   </a:lnTo>
                   <a:lnTo>
-                    <a:pt x="4229607" y="1696979"/>
+                    <a:pt x="4229607" y="1696980"/>
                   </a:lnTo>
                   <a:lnTo>
                     <a:pt x="4242992" y="1712842"/>
@@ -6947,10 +6947,10 @@
                     <a:pt x="4283146" y="1758055"/>
                   </a:lnTo>
                   <a:lnTo>
-                    <a:pt x="4296531" y="1772371"/>
-                  </a:lnTo>
-                  <a:lnTo>
-                    <a:pt x="4309916" y="1786378"/>
+                    <a:pt x="4296531" y="1772372"/>
+                  </a:lnTo>
+                  <a:lnTo>
+                    <a:pt x="4309916" y="1786379"/>
                   </a:lnTo>
                   <a:lnTo>
                     <a:pt x="4323301" y="1800028"/>
@@ -6962,7 +6962,7 @@
                     <a:pt x="4350070" y="1826313"/>
                   </a:lnTo>
                   <a:lnTo>
-                    <a:pt x="4363455" y="1839054"/>
+                    <a:pt x="4363455" y="1839055"/>
                   </a:lnTo>
                   <a:lnTo>
                     <a:pt x="4376840" y="1851481"/>
@@ -6971,7 +6971,7 @@
                     <a:pt x="4390225" y="1863589"/>
                   </a:lnTo>
                   <a:lnTo>
-                    <a:pt x="4403610" y="1875456"/>
+                    <a:pt x="4403610" y="1875457"/>
                   </a:lnTo>
                   <a:lnTo>
                     <a:pt x="4416994" y="1887087"/>
@@ -6983,7 +6983,7 @@
                     <a:pt x="4443764" y="1909476"/>
                   </a:lnTo>
                   <a:lnTo>
-                    <a:pt x="4457149" y="1920302"/>
+                    <a:pt x="4457149" y="1920303"/>
                   </a:lnTo>
                   <a:lnTo>
                     <a:pt x="4470534" y="1930905"/>
@@ -7001,13 +7001,13 @@
                     <a:pt x="4524073" y="1970713"/>
                   </a:lnTo>
                   <a:lnTo>
-                    <a:pt x="4537458" y="1980041"/>
+                    <a:pt x="4537458" y="1980042"/>
                   </a:lnTo>
                   <a:lnTo>
                     <a:pt x="4550843" y="1989111"/>
                   </a:lnTo>
                   <a:lnTo>
-                    <a:pt x="4564228" y="1997967"/>
+                    <a:pt x="4564228" y="1997968"/>
                   </a:lnTo>
                   <a:lnTo>
                     <a:pt x="4577612" y="2006612"/>
@@ -7025,7 +7025,7 @@
                     <a:pt x="4631152" y="2038744"/>
                   </a:lnTo>
                   <a:lnTo>
-                    <a:pt x="4644537" y="2046203"/>
+                    <a:pt x="4644537" y="2046204"/>
                   </a:lnTo>
                   <a:lnTo>
                     <a:pt x="4657921" y="2053449"/>
@@ -7040,7 +7040,7 @@
                     <a:pt x="4698076" y="2074071"/>
                   </a:lnTo>
                   <a:lnTo>
-                    <a:pt x="4711461" y="2080562"/>
+                    <a:pt x="4711461" y="2080563"/>
                   </a:lnTo>
                   <a:lnTo>
                     <a:pt x="4724846" y="2086910"/>
@@ -7064,7 +7064,7 @@
                     <a:pt x="4805155" y="2122258"/>
                   </a:lnTo>
                   <a:lnTo>
-                    <a:pt x="4818539" y="2127830"/>
+                    <a:pt x="4818539" y="2127831"/>
                   </a:lnTo>
                   <a:lnTo>
                     <a:pt x="4831924" y="2133361"/>
@@ -7088,7 +7088,7 @@
                     <a:pt x="4912233" y="2166418"/>
                   </a:lnTo>
                   <a:lnTo>
-                    <a:pt x="4925618" y="2172064"/>
+                    <a:pt x="4925618" y="2172065"/>
                   </a:lnTo>
                   <a:lnTo>
                     <a:pt x="4939003" y="2177780"/>
@@ -7100,7 +7100,7 @@
                     <a:pt x="4965773" y="2189509"/>
                   </a:lnTo>
                   <a:lnTo>
-                    <a:pt x="4979157" y="2195551"/>
+                    <a:pt x="4979157" y="2195552"/>
                   </a:lnTo>
                   <a:lnTo>
                     <a:pt x="4992542" y="2201708"/>
@@ -7115,7 +7115,7 @@
                     <a:pt x="5032697" y="2221087"/>
                   </a:lnTo>
                   <a:lnTo>
-                    <a:pt x="5046082" y="2227851"/>
+                    <a:pt x="5046082" y="2227852"/>
                   </a:lnTo>
                   <a:lnTo>
                     <a:pt x="5059466" y="2234775"/>
@@ -7142,16 +7142,16 @@
                     <a:pt x="5153160" y="2288377"/>
                   </a:lnTo>
                   <a:lnTo>
-                    <a:pt x="5166545" y="2296712"/>
-                  </a:lnTo>
-                  <a:lnTo>
-                    <a:pt x="5179930" y="2305244"/>
+                    <a:pt x="5166545" y="2296713"/>
+                  </a:lnTo>
+                  <a:lnTo>
+                    <a:pt x="5179930" y="2305245"/>
                   </a:lnTo>
                   <a:lnTo>
                     <a:pt x="5193315" y="2313908"/>
                   </a:lnTo>
                   <a:lnTo>
-                    <a:pt x="5206700" y="2322698"/>
+                    <a:pt x="5206700" y="2322699"/>
                   </a:lnTo>
                   <a:lnTo>
                     <a:pt x="5220084" y="2331625"/>
@@ -7163,10 +7163,10 @@
                     <a:pt x="5246854" y="2349856"/>
                   </a:lnTo>
                   <a:lnTo>
-                    <a:pt x="5260239" y="2359101"/>
-                  </a:lnTo>
-                  <a:lnTo>
-                    <a:pt x="5273624" y="2368431"/>
+                    <a:pt x="5260239" y="2359102"/>
+                  </a:lnTo>
+                  <a:lnTo>
+                    <a:pt x="5273624" y="2368432"/>
                   </a:lnTo>
                   <a:lnTo>
                     <a:pt x="5287009" y="2377834"/>
@@ -7175,7 +7175,7 @@
                     <a:pt x="5300393" y="2387274"/>
                   </a:lnTo>
                   <a:lnTo>
-                    <a:pt x="5313778" y="2396741"/>
+                    <a:pt x="5313778" y="2396742"/>
                   </a:lnTo>
                   <a:lnTo>
                     <a:pt x="5327163" y="2406226"/>
@@ -7208,7 +7208,7 @@
                     <a:pt x="5447627" y="2489133"/>
                   </a:lnTo>
                   <a:lnTo>
-                    <a:pt x="5461011" y="2497749"/>
+                    <a:pt x="5461011" y="2497750"/>
                   </a:lnTo>
                   <a:lnTo>
                     <a:pt x="5474396" y="2506210"/>
@@ -7226,7 +7226,7 @@
                     <a:pt x="5527936" y="2537885"/>
                   </a:lnTo>
                   <a:lnTo>
-                    <a:pt x="5541320" y="2545211"/>
+                    <a:pt x="5541320" y="2545212"/>
                   </a:lnTo>
                   <a:lnTo>
                     <a:pt x="5554705" y="2552263"/>
@@ -7265,7 +7265,7 @@
                     <a:pt x="5701938" y="2611550"/>
                   </a:lnTo>
                   <a:lnTo>
-                    <a:pt x="5715323" y="2615170"/>
+                    <a:pt x="5715323" y="2615171"/>
                   </a:lnTo>
                   <a:lnTo>
                     <a:pt x="5728708" y="2618542"/>
@@ -7277,7 +7277,7 @@
                     <a:pt x="5755478" y="2624456"/>
                   </a:lnTo>
                   <a:lnTo>
-                    <a:pt x="5768863" y="2626991"/>
+                    <a:pt x="5768863" y="2626992"/>
                   </a:lnTo>
                   <a:lnTo>
                     <a:pt x="5782247" y="2629304"/>
@@ -7286,7 +7286,7 @@
                     <a:pt x="5795632" y="2631398"/>
                   </a:lnTo>
                   <a:lnTo>
-                    <a:pt x="5809017" y="2633194"/>
+                    <a:pt x="5809017" y="2633195"/>
                   </a:lnTo>
                   <a:lnTo>
                     <a:pt x="5822402" y="2634783"/>
@@ -7295,7 +7295,7 @@
                     <a:pt x="5835787" y="2636186"/>
                   </a:lnTo>
                   <a:lnTo>
-                    <a:pt x="5849172" y="2637410"/>
+                    <a:pt x="5849172" y="2637411"/>
                   </a:lnTo>
                   <a:lnTo>
                     <a:pt x="5862556" y="2638394"/>
@@ -7313,7 +7313,7 @@
                     <a:pt x="5916096" y="2640857"/>
                   </a:lnTo>
                   <a:lnTo>
-                    <a:pt x="5929481" y="2641144"/>
+                    <a:pt x="5929481" y="2641145"/>
                   </a:lnTo>
                   <a:lnTo>
                     <a:pt x="5942865" y="2641343"/>
@@ -7322,7 +7322,7 @@
                     <a:pt x="5956250" y="2641461"/>
                   </a:lnTo>
                   <a:lnTo>
-                    <a:pt x="5969635" y="2641484"/>
+                    <a:pt x="5969635" y="2641485"/>
                   </a:lnTo>
                   <a:lnTo>
                     <a:pt x="5983020" y="2641462"/>
@@ -7334,7 +7334,7 @@
                     <a:pt x="6009790" y="2641309"/>
                   </a:lnTo>
                   <a:lnTo>
-                    <a:pt x="6023174" y="2641196"/>
+                    <a:pt x="6023174" y="2641197"/>
                   </a:lnTo>
                   <a:lnTo>
                     <a:pt x="6036559" y="2641085"/>
@@ -7346,7 +7346,7 @@
                     <a:pt x="6063329" y="2640892"/>
                   </a:lnTo>
                   <a:lnTo>
-                    <a:pt x="6076714" y="2640843"/>
+                    <a:pt x="6076714" y="2640844"/>
                   </a:lnTo>
                   <a:lnTo>
                     <a:pt x="6090099" y="2640834"/>
@@ -7355,7 +7355,7 @@
                     <a:pt x="6103483" y="2640868"/>
                   </a:lnTo>
                   <a:lnTo>
-                    <a:pt x="6116868" y="2640955"/>
+                    <a:pt x="6116868" y="2640956"/>
                   </a:lnTo>
                   <a:lnTo>
                     <a:pt x="6130253" y="2641126"/>
@@ -7382,40 +7382,40 @@
                     <a:pt x="6223947" y="2644463"/>
                   </a:lnTo>
                   <a:lnTo>
-                    <a:pt x="6237332" y="2645297"/>
+                    <a:pt x="6237332" y="2645298"/>
                   </a:lnTo>
                   <a:lnTo>
                     <a:pt x="6250717" y="2646207"/>
                   </a:lnTo>
                   <a:lnTo>
-                    <a:pt x="6264101" y="2647190"/>
+                    <a:pt x="6264101" y="2647191"/>
                   </a:lnTo>
                   <a:lnTo>
                     <a:pt x="6277486" y="2648257"/>
                   </a:lnTo>
                   <a:lnTo>
-                    <a:pt x="6290871" y="2649413"/>
+                    <a:pt x="6290871" y="2649414"/>
                   </a:lnTo>
                   <a:lnTo>
                     <a:pt x="6304256" y="2650632"/>
                   </a:lnTo>
                   <a:lnTo>
-                    <a:pt x="6317641" y="2651908"/>
+                    <a:pt x="6317641" y="2651909"/>
                   </a:lnTo>
                   <a:lnTo>
                     <a:pt x="6331026" y="2653250"/>
                   </a:lnTo>
                   <a:lnTo>
-                    <a:pt x="6344410" y="2654653"/>
-                  </a:lnTo>
-                  <a:lnTo>
-                    <a:pt x="6357795" y="2656097"/>
+                    <a:pt x="6344410" y="2654654"/>
+                  </a:lnTo>
+                  <a:lnTo>
+                    <a:pt x="6357795" y="2656098"/>
                   </a:lnTo>
                   <a:lnTo>
                     <a:pt x="6371180" y="2657578"/>
                   </a:lnTo>
                   <a:lnTo>
-                    <a:pt x="6384565" y="2659095"/>
+                    <a:pt x="6384565" y="2659096"/>
                   </a:lnTo>
                   <a:lnTo>
                     <a:pt x="6397950" y="2660642"/>
@@ -7427,19 +7427,19 @@
                     <a:pt x="6424719" y="2663777"/>
                   </a:lnTo>
                   <a:lnTo>
-                    <a:pt x="6438104" y="2665357"/>
+                    <a:pt x="6438104" y="2665358"/>
                   </a:lnTo>
                   <a:lnTo>
                     <a:pt x="6451489" y="2666935"/>
                   </a:lnTo>
                   <a:lnTo>
-                    <a:pt x="6464874" y="2668503"/>
+                    <a:pt x="6464874" y="2668504"/>
                   </a:lnTo>
                   <a:lnTo>
                     <a:pt x="6478259" y="2670061"/>
                   </a:lnTo>
                   <a:lnTo>
-                    <a:pt x="6491644" y="2671596"/>
+                    <a:pt x="6491644" y="2671597"/>
                   </a:lnTo>
                   <a:lnTo>
                     <a:pt x="6505028" y="2673104"/>
@@ -7457,16 +7457,16 @@
                     <a:pt x="6558568" y="2678807"/>
                   </a:lnTo>
                   <a:lnTo>
-                    <a:pt x="6571953" y="2680132"/>
-                  </a:lnTo>
-                  <a:lnTo>
-                    <a:pt x="6585337" y="2681418"/>
+                    <a:pt x="6571953" y="2680133"/>
+                  </a:lnTo>
+                  <a:lnTo>
+                    <a:pt x="6585337" y="2681419"/>
                   </a:lnTo>
                   <a:lnTo>
                     <a:pt x="6598722" y="2682650"/>
                   </a:lnTo>
                   <a:lnTo>
-                    <a:pt x="6612107" y="2683832"/>
+                    <a:pt x="6612107" y="2683833"/>
                   </a:lnTo>
                   <a:lnTo>
                     <a:pt x="6625492" y="2684973"/>
@@ -7484,13 +7484,13 @@
                     <a:pt x="6679031" y="2689073"/>
                   </a:lnTo>
                   <a:lnTo>
-                    <a:pt x="6692416" y="2689995"/>
+                    <a:pt x="6692416" y="2689996"/>
                   </a:lnTo>
                   <a:lnTo>
                     <a:pt x="6705801" y="2690870"/>
                   </a:lnTo>
                   <a:lnTo>
-                    <a:pt x="6719186" y="2691709"/>
+                    <a:pt x="6719186" y="2691710"/>
                   </a:lnTo>
                   <a:lnTo>
                     <a:pt x="6732571" y="2692519"/>
@@ -7508,7 +7508,7 @@
                     <a:pt x="6786110" y="2695477"/>
                   </a:lnTo>
                   <a:lnTo>
-                    <a:pt x="6799495" y="2696165"/>
+                    <a:pt x="6799495" y="2696166"/>
                   </a:lnTo>
                   <a:lnTo>
                     <a:pt x="6812880" y="2696834"/>
@@ -7860,13 +7860,13 @@
                     <a:pt x="1351868" y="1832187"/>
                   </a:lnTo>
                   <a:lnTo>
-                    <a:pt x="1365252" y="1808982"/>
+                    <a:pt x="1365252" y="1808983"/>
                   </a:lnTo>
                   <a:lnTo>
                     <a:pt x="1378637" y="1785401"/>
                   </a:lnTo>
                   <a:lnTo>
-                    <a:pt x="1392022" y="1761443"/>
+                    <a:pt x="1392022" y="1761444"/>
                   </a:lnTo>
                   <a:lnTo>
                     <a:pt x="1405407" y="1737012"/>
@@ -7899,19 +7899,19 @@
                     <a:pt x="1525870" y="1499200"/>
                   </a:lnTo>
                   <a:lnTo>
-                    <a:pt x="1539255" y="1470868"/>
-                  </a:lnTo>
-                  <a:lnTo>
-                    <a:pt x="1552640" y="1442219"/>
-                  </a:lnTo>
-                  <a:lnTo>
-                    <a:pt x="1566025" y="1413213"/>
+                    <a:pt x="1539255" y="1470869"/>
+                  </a:lnTo>
+                  <a:lnTo>
+                    <a:pt x="1552640" y="1442220"/>
+                  </a:lnTo>
+                  <a:lnTo>
+                    <a:pt x="1566025" y="1413214"/>
                   </a:lnTo>
                   <a:lnTo>
                     <a:pt x="1579410" y="1383821"/>
                   </a:lnTo>
                   <a:lnTo>
-                    <a:pt x="1592795" y="1354152"/>
+                    <a:pt x="1592795" y="1354153"/>
                   </a:lnTo>
                   <a:lnTo>
                     <a:pt x="1606179" y="1324221"/>
@@ -7998,7 +7998,7 @@
                     <a:pt x="1967570" y="543571"/>
                   </a:lnTo>
                   <a:lnTo>
-                    <a:pt x="1980955" y="521954"/>
+                    <a:pt x="1980955" y="521953"/>
                   </a:lnTo>
                   <a:lnTo>
                     <a:pt x="1994340" y="501113"/>
@@ -8007,7 +8007,7 @@
                     <a:pt x="2007724" y="481306"/>
                   </a:lnTo>
                   <a:lnTo>
-                    <a:pt x="2021109" y="462411"/>
+                    <a:pt x="2021109" y="462410"/>
                   </a:lnTo>
                   <a:lnTo>
                     <a:pt x="2034494" y="444292"/>
@@ -8019,7 +8019,7 @@
                     <a:pt x="2061264" y="410562"/>
                   </a:lnTo>
                   <a:lnTo>
-                    <a:pt x="2074649" y="395057"/>
+                    <a:pt x="2074649" y="395056"/>
                   </a:lnTo>
                   <a:lnTo>
                     <a:pt x="2088033" y="380255"/>
@@ -8031,7 +8031,7 @@
                     <a:pt x="2114803" y="352832"/>
                   </a:lnTo>
                   <a:lnTo>
-                    <a:pt x="2128188" y="340278"/>
+                    <a:pt x="2128188" y="340277"/>
                   </a:lnTo>
                   <a:lnTo>
                     <a:pt x="2141573" y="328290"/>
@@ -8049,7 +8049,7 @@
                     <a:pt x="2195112" y="285808"/>
                   </a:lnTo>
                   <a:lnTo>
-                    <a:pt x="2208497" y="276276"/>
+                    <a:pt x="2208497" y="276275"/>
                   </a:lnTo>
                   <a:lnTo>
                     <a:pt x="2221882" y="267116"/>
@@ -8061,7 +8061,7 @@
                     <a:pt x="2248651" y="249712"/>
                   </a:lnTo>
                   <a:lnTo>
-                    <a:pt x="2262036" y="241310"/>
+                    <a:pt x="2262036" y="241309"/>
                   </a:lnTo>
                   <a:lnTo>
                     <a:pt x="2275421" y="233082"/>
@@ -8079,7 +8079,7 @@
                     <a:pt x="2328960" y="201137"/>
                   </a:lnTo>
                   <a:lnTo>
-                    <a:pt x="2342345" y="193229"/>
+                    <a:pt x="2342345" y="193228"/>
                   </a:lnTo>
                   <a:lnTo>
                     <a:pt x="2355730" y="185305"/>
@@ -10963,13 +10963,13 @@
                     <a:pt x="1351868" y="1832187"/>
                   </a:lnTo>
                   <a:lnTo>
-                    <a:pt x="1365252" y="1808982"/>
+                    <a:pt x="1365252" y="1808983"/>
                   </a:lnTo>
                   <a:lnTo>
                     <a:pt x="1378637" y="1785401"/>
                   </a:lnTo>
                   <a:lnTo>
-                    <a:pt x="1392022" y="1761443"/>
+                    <a:pt x="1392022" y="1761444"/>
                   </a:lnTo>
                   <a:lnTo>
                     <a:pt x="1405407" y="1737012"/>
@@ -11002,19 +11002,19 @@
                     <a:pt x="1525870" y="1499200"/>
                   </a:lnTo>
                   <a:lnTo>
-                    <a:pt x="1539255" y="1470868"/>
-                  </a:lnTo>
-                  <a:lnTo>
-                    <a:pt x="1552640" y="1442219"/>
-                  </a:lnTo>
-                  <a:lnTo>
-                    <a:pt x="1566025" y="1413213"/>
+                    <a:pt x="1539255" y="1470869"/>
+                  </a:lnTo>
+                  <a:lnTo>
+                    <a:pt x="1552640" y="1442220"/>
+                  </a:lnTo>
+                  <a:lnTo>
+                    <a:pt x="1566025" y="1413214"/>
                   </a:lnTo>
                   <a:lnTo>
                     <a:pt x="1579410" y="1383821"/>
                   </a:lnTo>
                   <a:lnTo>
-                    <a:pt x="1592795" y="1354152"/>
+                    <a:pt x="1592795" y="1354153"/>
                   </a:lnTo>
                   <a:lnTo>
                     <a:pt x="1606179" y="1324221"/>
@@ -11101,7 +11101,7 @@
                     <a:pt x="1967570" y="543571"/>
                   </a:lnTo>
                   <a:lnTo>
-                    <a:pt x="1980955" y="521954"/>
+                    <a:pt x="1980955" y="521953"/>
                   </a:lnTo>
                   <a:lnTo>
                     <a:pt x="1994340" y="501113"/>
@@ -11110,7 +11110,7 @@
                     <a:pt x="2007724" y="481306"/>
                   </a:lnTo>
                   <a:lnTo>
-                    <a:pt x="2021109" y="462411"/>
+                    <a:pt x="2021109" y="462410"/>
                   </a:lnTo>
                   <a:lnTo>
                     <a:pt x="2034494" y="444292"/>
@@ -11122,7 +11122,7 @@
                     <a:pt x="2061264" y="410562"/>
                   </a:lnTo>
                   <a:lnTo>
-                    <a:pt x="2074649" y="395057"/>
+                    <a:pt x="2074649" y="395056"/>
                   </a:lnTo>
                   <a:lnTo>
                     <a:pt x="2088033" y="380255"/>
@@ -11134,7 +11134,7 @@
                     <a:pt x="2114803" y="352832"/>
                   </a:lnTo>
                   <a:lnTo>
-                    <a:pt x="2128188" y="340278"/>
+                    <a:pt x="2128188" y="340277"/>
                   </a:lnTo>
                   <a:lnTo>
                     <a:pt x="2141573" y="328290"/>
@@ -11152,7 +11152,7 @@
                     <a:pt x="2195112" y="285808"/>
                   </a:lnTo>
                   <a:lnTo>
-                    <a:pt x="2208497" y="276276"/>
+                    <a:pt x="2208497" y="276275"/>
                   </a:lnTo>
                   <a:lnTo>
                     <a:pt x="2221882" y="267116"/>
@@ -11164,7 +11164,7 @@
                     <a:pt x="2248651" y="249712"/>
                   </a:lnTo>
                   <a:lnTo>
-                    <a:pt x="2262036" y="241310"/>
+                    <a:pt x="2262036" y="241309"/>
                   </a:lnTo>
                   <a:lnTo>
                     <a:pt x="2275421" y="233082"/>
@@ -11182,7 +11182,7 @@
                     <a:pt x="2328960" y="201137"/>
                   </a:lnTo>
                   <a:lnTo>
-                    <a:pt x="2342345" y="193229"/>
+                    <a:pt x="2342345" y="193228"/>
                   </a:lnTo>
                   <a:lnTo>
                     <a:pt x="2355730" y="185305"/>
